--- a/ppt/算法讲解199【挺难】基环树和相关题目.pptx
+++ b/ppt/算法讲解199【挺难】基环树和相关题目.pptx
@@ -7589,7 +7589,7 @@
               </a:defRPr>
             </a:pPr>
             <a:r>
-              <a:t>图中有n个点、n条无向边，图是一棵基环树</a:t>
+              <a:t>图中有n个点、n条无向边，图是一棵基环树，图中没有重边和自环</a:t>
             </a:r>
           </a:p>
           <a:p>

--- a/ppt/算法讲解199【挺难】基环树和相关题目.pptx
+++ b/ppt/算法讲解199【挺难】基环树和相关题目.pptx
@@ -7605,23 +7605,55 @@
               </a:defRPr>
             </a:pPr>
             <a:r>
-              <a:t>路径长度为边的数量，要求路径长度 &gt;= 1，求这样的路径数量是多少</a:t>
-            </a:r>
-          </a:p>
-          <a:p>
-            <a:pPr algn="l" defTabSz="457200">
-              <a:defRPr sz="3600">
-                <a:solidFill>
-                  <a:srgbClr val="000000"/>
-                </a:solidFill>
-                <a:latin typeface="Monaco"/>
-                <a:ea typeface="Monaco"/>
-                <a:cs typeface="Monaco"/>
-                <a:sym typeface="Monaco"/>
-              </a:defRPr>
-            </a:pPr>
-            <a:r>
-              <a:t>路径a、b、c和c、b、a，认为是同一条简单路径，不要重复计算</a:t>
+              <a:t>点x到点y的简单路径，要求没有重复节点，要求边的数量 &gt;= 1</a:t>
+            </a:r>
+          </a:p>
+          <a:p>
+            <a:pPr algn="l" defTabSz="457200">
+              <a:defRPr sz="3600">
+                <a:solidFill>
+                  <a:srgbClr val="000000"/>
+                </a:solidFill>
+                <a:latin typeface="Monaco"/>
+                <a:ea typeface="Monaco"/>
+                <a:cs typeface="Monaco"/>
+                <a:sym typeface="Monaco"/>
+              </a:defRPr>
+            </a:pPr>
+            <a:r>
+              <a:t>如果两条简单路径只有方向相反，那么认为是同一条简单路径，不要重复统计</a:t>
+            </a:r>
+          </a:p>
+          <a:p>
+            <a:pPr algn="l" defTabSz="457200">
+              <a:defRPr sz="3600">
+                <a:solidFill>
+                  <a:srgbClr val="000000"/>
+                </a:solidFill>
+                <a:latin typeface="Monaco"/>
+                <a:ea typeface="Monaco"/>
+                <a:cs typeface="Monaco"/>
+                <a:sym typeface="Monaco"/>
+              </a:defRPr>
+            </a:pPr>
+            <a:r>
+              <a:t>比如(a, b, c)和(c, b, a)，就是同一条简单路径</a:t>
+            </a:r>
+          </a:p>
+          <a:p>
+            <a:pPr algn="l" defTabSz="457200">
+              <a:defRPr sz="3600">
+                <a:solidFill>
+                  <a:srgbClr val="000000"/>
+                </a:solidFill>
+                <a:latin typeface="Monaco"/>
+                <a:ea typeface="Monaco"/>
+                <a:cs typeface="Monaco"/>
+                <a:sym typeface="Monaco"/>
+              </a:defRPr>
+            </a:pPr>
+            <a:r>
+              <a:t>计算图中简单路径的数量</a:t>
             </a:r>
           </a:p>
           <a:p>
@@ -7677,6 +7709,19 @@
               </a:rPr>
               <a:t>https://codeforces.com/problemset/problem/1454/E</a:t>
             </a:r>
+          </a:p>
+          <a:p>
+            <a:pPr algn="l" defTabSz="457200">
+              <a:defRPr sz="3600">
+                <a:solidFill>
+                  <a:srgbClr val="000000"/>
+                </a:solidFill>
+                <a:latin typeface="Monaco"/>
+                <a:ea typeface="Monaco"/>
+                <a:cs typeface="Monaco"/>
+                <a:sym typeface="Monaco"/>
+              </a:defRPr>
+            </a:pPr>
           </a:p>
           <a:p>
             <a:pPr algn="l" defTabSz="457200">
@@ -7708,44 +7753,7 @@
               </a:defRPr>
             </a:pPr>
             <a:r>
-              <a:t>标记环上所有点</a:t>
-            </a:r>
-          </a:p>
-          <a:p>
-            <a:pPr algn="l" defTabSz="457200">
-              <a:defRPr sz="3600">
-                <a:solidFill>
-                  <a:schemeClr val="accent5">
-                    <a:hueOff val="-82419"/>
-                    <a:satOff val="-9513"/>
-                    <a:lumOff val="-16343"/>
-                  </a:schemeClr>
-                </a:solidFill>
-                <a:latin typeface="Monaco"/>
-                <a:ea typeface="Monaco"/>
-                <a:cs typeface="Monaco"/>
-                <a:sym typeface="Monaco"/>
-              </a:defRPr>
-            </a:pPr>
-          </a:p>
-          <a:p>
-            <a:pPr algn="l" defTabSz="457200">
-              <a:defRPr sz="3600">
-                <a:solidFill>
-                  <a:schemeClr val="accent5">
-                    <a:hueOff val="-82419"/>
-                    <a:satOff val="-9513"/>
-                    <a:lumOff val="-16343"/>
-                  </a:schemeClr>
-                </a:solidFill>
-                <a:latin typeface="Monaco"/>
-                <a:ea typeface="Monaco"/>
-                <a:cs typeface="Monaco"/>
-                <a:sym typeface="Monaco"/>
-              </a:defRPr>
-            </a:pPr>
-            <a:r>
-              <a:t>每个点的分树上统计节点数</a:t>
+              <a:t>标记环上所有点 + 每棵分树统计节点数 + 公式化简</a:t>
             </a:r>
           </a:p>
         </p:txBody>
